--- a/projects/dna_time_series_analysis.pptx
+++ b/projects/dna_time_series_analysis.pptx
@@ -37,218 +37,6 @@
     </p:ext>
   </p:extLst>
 </p:presentation>
-</file>
-
-<file path=ppt/revisionInfo.xml><?xml version="1.0" encoding="utf-8"?>
-<p1510:revInfo xmlns:a="http://schemas.openxmlformats.org/drawingml/2006/main" xmlns:r="http://schemas.openxmlformats.org/officeDocument/2006/relationships" xmlns:p1510="http://schemas.microsoft.com/office/powerpoint/2015/10/main">
-  <p1510:revLst>
-    <p1510:client id="{A1F52AA9-91DE-4B57-BB4A-BE6299755CBC}" v="10" dt="2026-07-07T12:41:25.231"/>
-  </p1510:revLst>
-</p1510:revInfo>
-</file>
-
-<file path=ppt/changesInfos/changesInfo1.xml><?xml version="1.0" encoding="utf-8"?>
-<pc:chgInfo xmlns:a="http://schemas.openxmlformats.org/drawingml/2006/main" xmlns:r="http://schemas.openxmlformats.org/officeDocument/2006/relationships" xmlns:ac="http://schemas.microsoft.com/office/drawing/2013/main/command" xmlns:pc="http://schemas.microsoft.com/office/powerpoint/2013/main/command">
-  <pc:docChgLst>
-    <pc:chgData name="THRUPP, Fiona (NHS BRISTOL, NORTH SOMERSET AND SOUTH GLOUCESTERSHIRE ICB - 15C)" userId="90fc2996-5a4d-48a4-936d-d742363f4bf1" providerId="ADAL" clId="{95736B0D-8631-4878-826A-07F31FCF8A4A}"/>
-    <pc:docChg chg="undo custSel addSld delSld modSld sldOrd">
-      <pc:chgData name="THRUPP, Fiona (NHS BRISTOL, NORTH SOMERSET AND SOUTH GLOUCESTERSHIRE ICB - 15C)" userId="90fc2996-5a4d-48a4-936d-d742363f4bf1" providerId="ADAL" clId="{95736B0D-8631-4878-826A-07F31FCF8A4A}" dt="2026-07-07T12:49:46.800" v="2291" actId="20577"/>
-      <pc:docMkLst>
-        <pc:docMk/>
-      </pc:docMkLst>
-      <pc:sldChg chg="add">
-        <pc:chgData name="THRUPP, Fiona (NHS BRISTOL, NORTH SOMERSET AND SOUTH GLOUCESTERSHIRE ICB - 15C)" userId="90fc2996-5a4d-48a4-936d-d742363f4bf1" providerId="ADAL" clId="{95736B0D-8631-4878-826A-07F31FCF8A4A}" dt="2026-07-07T12:34:13.622" v="151"/>
-        <pc:sldMkLst>
-          <pc:docMk/>
-          <pc:sldMk cId="2348838083" sldId="316"/>
-        </pc:sldMkLst>
-      </pc:sldChg>
-      <pc:sldChg chg="addSp delSp modSp mod">
-        <pc:chgData name="THRUPP, Fiona (NHS BRISTOL, NORTH SOMERSET AND SOUTH GLOUCESTERSHIRE ICB - 15C)" userId="90fc2996-5a4d-48a4-936d-d742363f4bf1" providerId="ADAL" clId="{95736B0D-8631-4878-826A-07F31FCF8A4A}" dt="2026-07-07T12:41:56.020" v="1367" actId="207"/>
-        <pc:sldMkLst>
-          <pc:docMk/>
-          <pc:sldMk cId="3762567127" sldId="317"/>
-        </pc:sldMkLst>
-        <pc:spChg chg="mod">
-          <ac:chgData name="THRUPP, Fiona (NHS BRISTOL, NORTH SOMERSET AND SOUTH GLOUCESTERSHIRE ICB - 15C)" userId="90fc2996-5a4d-48a4-936d-d742363f4bf1" providerId="ADAL" clId="{95736B0D-8631-4878-826A-07F31FCF8A4A}" dt="2026-07-07T12:41:18.931" v="1223" actId="1076"/>
-          <ac:spMkLst>
-            <pc:docMk/>
-            <pc:sldMk cId="3762567127" sldId="317"/>
-            <ac:spMk id="2" creationId="{B3C360FA-0503-1572-AF15-554061CE6D9B}"/>
-          </ac:spMkLst>
-        </pc:spChg>
-        <pc:spChg chg="add del mod">
-          <ac:chgData name="THRUPP, Fiona (NHS BRISTOL, NORTH SOMERSET AND SOUTH GLOUCESTERSHIRE ICB - 15C)" userId="90fc2996-5a4d-48a4-936d-d742363f4bf1" providerId="ADAL" clId="{95736B0D-8631-4878-826A-07F31FCF8A4A}" dt="2026-07-07T12:41:16.746" v="1222"/>
-          <ac:spMkLst>
-            <pc:docMk/>
-            <pc:sldMk cId="3762567127" sldId="317"/>
-            <ac:spMk id="3" creationId="{1CD12C00-44F6-1A52-5074-16DFE49AE3CB}"/>
-          </ac:spMkLst>
-        </pc:spChg>
-        <pc:spChg chg="add mod">
-          <ac:chgData name="THRUPP, Fiona (NHS BRISTOL, NORTH SOMERSET AND SOUTH GLOUCESTERSHIRE ICB - 15C)" userId="90fc2996-5a4d-48a4-936d-d742363f4bf1" providerId="ADAL" clId="{95736B0D-8631-4878-826A-07F31FCF8A4A}" dt="2026-07-07T12:41:56.020" v="1367" actId="207"/>
-          <ac:spMkLst>
-            <pc:docMk/>
-            <pc:sldMk cId="3762567127" sldId="317"/>
-            <ac:spMk id="5" creationId="{C27C6348-01E5-0F30-757B-F65044A3C184}"/>
-          </ac:spMkLst>
-        </pc:spChg>
-        <pc:graphicFrameChg chg="add mod">
-          <ac:chgData name="THRUPP, Fiona (NHS BRISTOL, NORTH SOMERSET AND SOUTH GLOUCESTERSHIRE ICB - 15C)" userId="90fc2996-5a4d-48a4-936d-d742363f4bf1" providerId="ADAL" clId="{95736B0D-8631-4878-826A-07F31FCF8A4A}" dt="2026-07-07T12:41:15.077" v="1220"/>
-          <ac:graphicFrameMkLst>
-            <pc:docMk/>
-            <pc:sldMk cId="3762567127" sldId="317"/>
-            <ac:graphicFrameMk id="4" creationId="{6AE00BB5-30CF-9D1F-3289-C4E5D32A1950}"/>
-          </ac:graphicFrameMkLst>
-        </pc:graphicFrameChg>
-      </pc:sldChg>
-      <pc:sldChg chg="modSp mod">
-        <pc:chgData name="THRUPP, Fiona (NHS BRISTOL, NORTH SOMERSET AND SOUTH GLOUCESTERSHIRE ICB - 15C)" userId="90fc2996-5a4d-48a4-936d-d742363f4bf1" providerId="ADAL" clId="{95736B0D-8631-4878-826A-07F31FCF8A4A}" dt="2026-07-07T12:49:46.800" v="2291" actId="20577"/>
-        <pc:sldMkLst>
-          <pc:docMk/>
-          <pc:sldMk cId="2719070435" sldId="320"/>
-        </pc:sldMkLst>
-        <pc:spChg chg="mod">
-          <ac:chgData name="THRUPP, Fiona (NHS BRISTOL, NORTH SOMERSET AND SOUTH GLOUCESTERSHIRE ICB - 15C)" userId="90fc2996-5a4d-48a4-936d-d742363f4bf1" providerId="ADAL" clId="{95736B0D-8631-4878-826A-07F31FCF8A4A}" dt="2026-07-07T12:49:46.800" v="2291" actId="20577"/>
-          <ac:spMkLst>
-            <pc:docMk/>
-            <pc:sldMk cId="2719070435" sldId="320"/>
-            <ac:spMk id="2" creationId="{44FB5397-A54A-47F6-E1DB-313F63DC2485}"/>
-          </ac:spMkLst>
-        </pc:spChg>
-        <pc:spChg chg="mod">
-          <ac:chgData name="THRUPP, Fiona (NHS BRISTOL, NORTH SOMERSET AND SOUTH GLOUCESTERSHIRE ICB - 15C)" userId="90fc2996-5a4d-48a4-936d-d742363f4bf1" providerId="ADAL" clId="{95736B0D-8631-4878-826A-07F31FCF8A4A}" dt="2026-07-07T12:49:12.818" v="2238" actId="6549"/>
-          <ac:spMkLst>
-            <pc:docMk/>
-            <pc:sldMk cId="2719070435" sldId="320"/>
-            <ac:spMk id="12" creationId="{F2B8775F-00C5-D4FF-25BF-E26EC268CCDB}"/>
-          </ac:spMkLst>
-        </pc:spChg>
-        <pc:picChg chg="mod">
-          <ac:chgData name="THRUPP, Fiona (NHS BRISTOL, NORTH SOMERSET AND SOUTH GLOUCESTERSHIRE ICB - 15C)" userId="90fc2996-5a4d-48a4-936d-d742363f4bf1" providerId="ADAL" clId="{95736B0D-8631-4878-826A-07F31FCF8A4A}" dt="2026-07-07T12:48:33.909" v="2177" actId="1076"/>
-          <ac:picMkLst>
-            <pc:docMk/>
-            <pc:sldMk cId="2719070435" sldId="320"/>
-            <ac:picMk id="10" creationId="{90EE963E-71AE-F2E6-E3A9-F5A5C79BE064}"/>
-          </ac:picMkLst>
-        </pc:picChg>
-      </pc:sldChg>
-      <pc:sldChg chg="addSp modSp add mod">
-        <pc:chgData name="THRUPP, Fiona (NHS BRISTOL, NORTH SOMERSET AND SOUTH GLOUCESTERSHIRE ICB - 15C)" userId="90fc2996-5a4d-48a4-936d-d742363f4bf1" providerId="ADAL" clId="{95736B0D-8631-4878-826A-07F31FCF8A4A}" dt="2026-07-07T12:36:20.612" v="599" actId="20577"/>
-        <pc:sldMkLst>
-          <pc:docMk/>
-          <pc:sldMk cId="335047771" sldId="322"/>
-        </pc:sldMkLst>
-        <pc:spChg chg="add mod">
-          <ac:chgData name="THRUPP, Fiona (NHS BRISTOL, NORTH SOMERSET AND SOUTH GLOUCESTERSHIRE ICB - 15C)" userId="90fc2996-5a4d-48a4-936d-d742363f4bf1" providerId="ADAL" clId="{95736B0D-8631-4878-826A-07F31FCF8A4A}" dt="2026-07-07T12:36:20.612" v="599" actId="20577"/>
-          <ac:spMkLst>
-            <pc:docMk/>
-            <pc:sldMk cId="335047771" sldId="322"/>
-            <ac:spMk id="5" creationId="{DA5D4EA1-EF22-EEF8-133B-9FA236E12BE7}"/>
-          </ac:spMkLst>
-        </pc:spChg>
-      </pc:sldChg>
-      <pc:sldChg chg="modSp mod">
-        <pc:chgData name="THRUPP, Fiona (NHS BRISTOL, NORTH SOMERSET AND SOUTH GLOUCESTERSHIRE ICB - 15C)" userId="90fc2996-5a4d-48a4-936d-d742363f4bf1" providerId="ADAL" clId="{95736B0D-8631-4878-826A-07F31FCF8A4A}" dt="2026-07-07T12:49:25.451" v="2245" actId="20577"/>
-        <pc:sldMkLst>
-          <pc:docMk/>
-          <pc:sldMk cId="4227319643" sldId="324"/>
-        </pc:sldMkLst>
-        <pc:spChg chg="mod">
-          <ac:chgData name="THRUPP, Fiona (NHS BRISTOL, NORTH SOMERSET AND SOUTH GLOUCESTERSHIRE ICB - 15C)" userId="90fc2996-5a4d-48a4-936d-d742363f4bf1" providerId="ADAL" clId="{95736B0D-8631-4878-826A-07F31FCF8A4A}" dt="2026-07-07T12:49:25.451" v="2245" actId="20577"/>
-          <ac:spMkLst>
-            <pc:docMk/>
-            <pc:sldMk cId="4227319643" sldId="324"/>
-            <ac:spMk id="2" creationId="{395E47FE-A326-3408-8F9F-85696BD692FE}"/>
-          </ac:spMkLst>
-        </pc:spChg>
-      </pc:sldChg>
-      <pc:sldChg chg="addSp delSp modSp mod ord">
-        <pc:chgData name="THRUPP, Fiona (NHS BRISTOL, NORTH SOMERSET AND SOUTH GLOUCESTERSHIRE ICB - 15C)" userId="90fc2996-5a4d-48a4-936d-d742363f4bf1" providerId="ADAL" clId="{95736B0D-8631-4878-826A-07F31FCF8A4A}" dt="2026-07-07T12:39:33.865" v="1085" actId="1076"/>
-        <pc:sldMkLst>
-          <pc:docMk/>
-          <pc:sldMk cId="1337982105" sldId="326"/>
-        </pc:sldMkLst>
-        <pc:spChg chg="mod">
-          <ac:chgData name="THRUPP, Fiona (NHS BRISTOL, NORTH SOMERSET AND SOUTH GLOUCESTERSHIRE ICB - 15C)" userId="90fc2996-5a4d-48a4-936d-d742363f4bf1" providerId="ADAL" clId="{95736B0D-8631-4878-826A-07F31FCF8A4A}" dt="2026-07-07T12:39:33.865" v="1085" actId="1076"/>
-          <ac:spMkLst>
-            <pc:docMk/>
-            <pc:sldMk cId="1337982105" sldId="326"/>
-            <ac:spMk id="4" creationId="{8FAB5B03-5182-CD6A-E615-AD679F26AB16}"/>
-          </ac:spMkLst>
-        </pc:spChg>
-        <pc:graphicFrameChg chg="add del mod">
-          <ac:chgData name="THRUPP, Fiona (NHS BRISTOL, NORTH SOMERSET AND SOUTH GLOUCESTERSHIRE ICB - 15C)" userId="90fc2996-5a4d-48a4-936d-d742363f4bf1" providerId="ADAL" clId="{95736B0D-8631-4878-826A-07F31FCF8A4A}" dt="2026-07-07T12:38:27.875" v="792" actId="478"/>
-          <ac:graphicFrameMkLst>
-            <pc:docMk/>
-            <pc:sldMk cId="1337982105" sldId="326"/>
-            <ac:graphicFrameMk id="5" creationId="{783518CD-62F6-1F14-AFDD-FF42DC362397}"/>
-          </ac:graphicFrameMkLst>
-        </pc:graphicFrameChg>
-        <pc:graphicFrameChg chg="add del mod">
-          <ac:chgData name="THRUPP, Fiona (NHS BRISTOL, NORTH SOMERSET AND SOUTH GLOUCESTERSHIRE ICB - 15C)" userId="90fc2996-5a4d-48a4-936d-d742363f4bf1" providerId="ADAL" clId="{95736B0D-8631-4878-826A-07F31FCF8A4A}" dt="2026-07-07T12:38:41.009" v="794" actId="478"/>
-          <ac:graphicFrameMkLst>
-            <pc:docMk/>
-            <pc:sldMk cId="1337982105" sldId="326"/>
-            <ac:graphicFrameMk id="6" creationId="{14C14802-653D-10D4-303C-0B7ED203B312}"/>
-          </ac:graphicFrameMkLst>
-        </pc:graphicFrameChg>
-        <pc:picChg chg="mod">
-          <ac:chgData name="THRUPP, Fiona (NHS BRISTOL, NORTH SOMERSET AND SOUTH GLOUCESTERSHIRE ICB - 15C)" userId="90fc2996-5a4d-48a4-936d-d742363f4bf1" providerId="ADAL" clId="{95736B0D-8631-4878-826A-07F31FCF8A4A}" dt="2026-07-07T12:39:30.641" v="1084" actId="1076"/>
-          <ac:picMkLst>
-            <pc:docMk/>
-            <pc:sldMk cId="1337982105" sldId="326"/>
-            <ac:picMk id="11" creationId="{874C6F56-4232-E7E1-0457-0101F5F781C4}"/>
-          </ac:picMkLst>
-        </pc:picChg>
-      </pc:sldChg>
-      <pc:sldChg chg="addSp modSp mod">
-        <pc:chgData name="THRUPP, Fiona (NHS BRISTOL, NORTH SOMERSET AND SOUTH GLOUCESTERSHIRE ICB - 15C)" userId="90fc2996-5a4d-48a4-936d-d742363f4bf1" providerId="ADAL" clId="{95736B0D-8631-4878-826A-07F31FCF8A4A}" dt="2026-07-07T12:35:15.808" v="388" actId="20577"/>
-        <pc:sldMkLst>
-          <pc:docMk/>
-          <pc:sldMk cId="1038275753" sldId="333"/>
-        </pc:sldMkLst>
-        <pc:spChg chg="add mod">
-          <ac:chgData name="THRUPP, Fiona (NHS BRISTOL, NORTH SOMERSET AND SOUTH GLOUCESTERSHIRE ICB - 15C)" userId="90fc2996-5a4d-48a4-936d-d742363f4bf1" providerId="ADAL" clId="{95736B0D-8631-4878-826A-07F31FCF8A4A}" dt="2026-07-07T12:35:15.808" v="388" actId="20577"/>
-          <ac:spMkLst>
-            <pc:docMk/>
-            <pc:sldMk cId="1038275753" sldId="333"/>
-            <ac:spMk id="5" creationId="{DAE2ECE0-8C6E-B915-7A8C-E2FF48810ABD}"/>
-          </ac:spMkLst>
-        </pc:spChg>
-      </pc:sldChg>
-      <pc:sldChg chg="modSp mod">
-        <pc:chgData name="THRUPP, Fiona (NHS BRISTOL, NORTH SOMERSET AND SOUTH GLOUCESTERSHIRE ICB - 15C)" userId="90fc2996-5a4d-48a4-936d-d742363f4bf1" providerId="ADAL" clId="{95736B0D-8631-4878-826A-07F31FCF8A4A}" dt="2026-07-07T12:46:51.115" v="2059" actId="20577"/>
-        <pc:sldMkLst>
-          <pc:docMk/>
-          <pc:sldMk cId="284970162" sldId="349"/>
-        </pc:sldMkLst>
-        <pc:spChg chg="mod">
-          <ac:chgData name="THRUPP, Fiona (NHS BRISTOL, NORTH SOMERSET AND SOUTH GLOUCESTERSHIRE ICB - 15C)" userId="90fc2996-5a4d-48a4-936d-d742363f4bf1" providerId="ADAL" clId="{95736B0D-8631-4878-826A-07F31FCF8A4A}" dt="2026-07-07T12:46:51.115" v="2059" actId="20577"/>
-          <ac:spMkLst>
-            <pc:docMk/>
-            <pc:sldMk cId="284970162" sldId="349"/>
-            <ac:spMk id="5" creationId="{02D2E1FB-24A5-7E6C-C172-F4CE15287144}"/>
-          </ac:spMkLst>
-        </pc:spChg>
-      </pc:sldChg>
-      <pc:sldChg chg="add del">
-        <pc:chgData name="THRUPP, Fiona (NHS BRISTOL, NORTH SOMERSET AND SOUTH GLOUCESTERSHIRE ICB - 15C)" userId="90fc2996-5a4d-48a4-936d-d742363f4bf1" providerId="ADAL" clId="{95736B0D-8631-4878-826A-07F31FCF8A4A}" dt="2026-07-07T12:34:17.714" v="152" actId="47"/>
-        <pc:sldMkLst>
-          <pc:docMk/>
-          <pc:sldMk cId="1032801360" sldId="350"/>
-        </pc:sldMkLst>
-      </pc:sldChg>
-      <pc:sldChg chg="add del">
-        <pc:chgData name="THRUPP, Fiona (NHS BRISTOL, NORTH SOMERSET AND SOUTH GLOUCESTERSHIRE ICB - 15C)" userId="90fc2996-5a4d-48a4-936d-d742363f4bf1" providerId="ADAL" clId="{95736B0D-8631-4878-826A-07F31FCF8A4A}" dt="2026-07-07T12:34:04.416" v="150" actId="47"/>
-        <pc:sldMkLst>
-          <pc:docMk/>
-          <pc:sldMk cId="1440165092" sldId="350"/>
-        </pc:sldMkLst>
-      </pc:sldChg>
-    </pc:docChg>
-  </pc:docChgLst>
-</pc:chgInfo>
 </file>
 
 <file path=ppt/notesMasters/notesMaster1.xml><?xml version="1.0" encoding="utf-8"?>
@@ -333,7 +121,7 @@
           <a:p>
             <a:fld id="{C93E7697-CAA0-1742-857D-B67FD3D2B4D1}" type="datetimeFigureOut">
               <a:rPr lang="en-US" smtClean="0"/>
-              <a:t>7/7/2026</a:t>
+              <a:t>8/17/2026</a:t>
             </a:fld>
             <a:endParaRPr lang="en-US"/>
           </a:p>
@@ -10423,7 +10211,7 @@
         <p:spPr>
           <a:xfrm>
             <a:off x="791549" y="2491980"/>
-            <a:ext cx="6893106" cy="1677243"/>
+            <a:ext cx="6893106" cy="2861070"/>
           </a:xfrm>
         </p:spPr>
         <p:txBody>
@@ -10434,7 +10222,7 @@
           <a:p>
             <a:r>
               <a:rPr lang="en-US" dirty="0"/>
-              <a:t>DNA</a:t>
+              <a:t>Missed Appointments in Acute Outpatient Settings</a:t>
             </a:r>
           </a:p>
         </p:txBody>
@@ -13936,6 +13724,38 @@
 </file>
 
 <file path=customXml/item1.xml><?xml version="1.0" encoding="utf-8"?>
+<p:properties xmlns:p="http://schemas.microsoft.com/office/2006/metadata/properties" xmlns:xsi="http://www.w3.org/2001/XMLSchema-instance" xmlns:pc="http://schemas.microsoft.com/office/infopath/2007/PartnerControls">
+  <documentManagement>
+    <lcf76f155ced4ddcb4097134ff3c332f xmlns="9481131a-5ef9-4c1f-b17b-99b9c4b05bfc">
+      <Terms xmlns="http://schemas.microsoft.com/office/infopath/2007/PartnerControls"/>
+    </lcf76f155ced4ddcb4097134ff3c332f>
+    <TaxCatchAll xmlns="321487e1-d70a-4ac7-a45d-cb1aeb6d772e" xsi:nil="true"/>
+    <SharedWithUsers xmlns="321487e1-d70a-4ac7-a45d-cb1aeb6d772e">
+      <UserInfo>
+        <DisplayName>MIDDA, Janette (NHS BRISTOL, NORTH SOMERSET AND SOUTH GLOUCESTERSHIRE ICB - 15C)</DisplayName>
+        <AccountId>171</AccountId>
+        <AccountType/>
+      </UserInfo>
+      <UserInfo>
+        <DisplayName>HAVERGAL, Naomi (NHS BRISTOL, NORTH SOMERSET AND SOUTH GLOUCESTERSHIRE ICB - 15C)</DisplayName>
+        <AccountId>65</AccountId>
+        <AccountType/>
+      </UserInfo>
+    </SharedWithUsers>
+  </documentManagement>
+</p:properties>
+</file>
+
+<file path=customXml/item2.xml><?xml version="1.0" encoding="utf-8"?>
+<?mso-contentType ?>
+<FormTemplates xmlns="http://schemas.microsoft.com/sharepoint/v3/contenttype/forms">
+  <Display>DocumentLibraryForm</Display>
+  <Edit>DocumentLibraryForm</Edit>
+  <New>DocumentLibraryForm</New>
+</FormTemplates>
+</file>
+
+<file path=customXml/item3.xml><?xml version="1.0" encoding="utf-8"?>
 <ct:contentTypeSchema xmlns:ct="http://schemas.microsoft.com/office/2006/metadata/contentType" xmlns:ma="http://schemas.microsoft.com/office/2006/metadata/properties/metaAttributes" ct:_="" ma:_="" ma:contentTypeName="Document" ma:contentTypeID="0x01010013227FA4040FC24A80A63F4C2205E1CD" ma:contentTypeVersion="17" ma:contentTypeDescription="Create a new document." ma:contentTypeScope="" ma:versionID="782248196dd72339bbadff48199afb1f">
   <xsd:schema xmlns:xsd="http://www.w3.org/2001/XMLSchema" xmlns:xs="http://www.w3.org/2001/XMLSchema" xmlns:p="http://schemas.microsoft.com/office/2006/metadata/properties" xmlns:ns2="9481131a-5ef9-4c1f-b17b-99b9c4b05bfc" xmlns:ns3="321487e1-d70a-4ac7-a45d-cb1aeb6d772e" targetNamespace="http://schemas.microsoft.com/office/2006/metadata/properties" ma:root="true" ma:fieldsID="2107a6a3ebb0be9b63fdd0906d8e4760" ns2:_="" ns3:_="">
     <xsd:import namespace="9481131a-5ef9-4c1f-b17b-99b9c4b05bfc"/>
@@ -14176,39 +13996,32 @@
 </ct:contentTypeSchema>
 </file>
 
-<file path=customXml/item2.xml><?xml version="1.0" encoding="utf-8"?>
-<?mso-contentType ?>
-<FormTemplates xmlns="http://schemas.microsoft.com/sharepoint/v3/contenttype/forms">
-  <Display>DocumentLibraryForm</Display>
-  <Edit>DocumentLibraryForm</Edit>
-  <New>DocumentLibraryForm</New>
-</FormTemplates>
+<file path=customXml/itemProps1.xml><?xml version="1.0" encoding="utf-8"?>
+<ds:datastoreItem xmlns:ds="http://schemas.openxmlformats.org/officeDocument/2006/customXml" ds:itemID="{4A3BB7FB-BD89-47DF-9FB1-3F904DBEB2A1}">
+  <ds:schemaRefs>
+    <ds:schemaRef ds:uri="http://schemas.microsoft.com/office/2006/metadata/properties"/>
+    <ds:schemaRef ds:uri="http://purl.org/dc/elements/1.1/"/>
+    <ds:schemaRef ds:uri="321487e1-d70a-4ac7-a45d-cb1aeb6d772e"/>
+    <ds:schemaRef ds:uri="http://schemas.openxmlformats.org/package/2006/metadata/core-properties"/>
+    <ds:schemaRef ds:uri="http://schemas.microsoft.com/office/2006/documentManagement/types"/>
+    <ds:schemaRef ds:uri="http://purl.org/dc/terms/"/>
+    <ds:schemaRef ds:uri="9481131a-5ef9-4c1f-b17b-99b9c4b05bfc"/>
+    <ds:schemaRef ds:uri="http://www.w3.org/XML/1998/namespace"/>
+    <ds:schemaRef ds:uri="http://schemas.microsoft.com/office/infopath/2007/PartnerControls"/>
+    <ds:schemaRef ds:uri="http://purl.org/dc/dcmitype/"/>
+  </ds:schemaRefs>
+</ds:datastoreItem>
 </file>
 
-<file path=customXml/item3.xml><?xml version="1.0" encoding="utf-8"?>
-<p:properties xmlns:p="http://schemas.microsoft.com/office/2006/metadata/properties" xmlns:xsi="http://www.w3.org/2001/XMLSchema-instance" xmlns:pc="http://schemas.microsoft.com/office/infopath/2007/PartnerControls">
-  <documentManagement>
-    <lcf76f155ced4ddcb4097134ff3c332f xmlns="9481131a-5ef9-4c1f-b17b-99b9c4b05bfc">
-      <Terms xmlns="http://schemas.microsoft.com/office/infopath/2007/PartnerControls"/>
-    </lcf76f155ced4ddcb4097134ff3c332f>
-    <TaxCatchAll xmlns="321487e1-d70a-4ac7-a45d-cb1aeb6d772e" xsi:nil="true"/>
-    <SharedWithUsers xmlns="321487e1-d70a-4ac7-a45d-cb1aeb6d772e">
-      <UserInfo>
-        <DisplayName>MIDDA, Janette (NHS BRISTOL, NORTH SOMERSET AND SOUTH GLOUCESTERSHIRE ICB - 15C)</DisplayName>
-        <AccountId>171</AccountId>
-        <AccountType/>
-      </UserInfo>
-      <UserInfo>
-        <DisplayName>HAVERGAL, Naomi (NHS BRISTOL, NORTH SOMERSET AND SOUTH GLOUCESTERSHIRE ICB - 15C)</DisplayName>
-        <AccountId>65</AccountId>
-        <AccountType/>
-      </UserInfo>
-    </SharedWithUsers>
-  </documentManagement>
-</p:properties>
+<file path=customXml/itemProps2.xml><?xml version="1.0" encoding="utf-8"?>
+<ds:datastoreItem xmlns:ds="http://schemas.openxmlformats.org/officeDocument/2006/customXml" ds:itemID="{3B5B47CC-B35C-4B2B-96E5-ADE35E9132A6}">
+  <ds:schemaRefs>
+    <ds:schemaRef ds:uri="http://schemas.microsoft.com/sharepoint/v3/contenttype/forms"/>
+  </ds:schemaRefs>
+</ds:datastoreItem>
 </file>
 
-<file path=customXml/itemProps1.xml><?xml version="1.0" encoding="utf-8"?>
+<file path=customXml/itemProps3.xml><?xml version="1.0" encoding="utf-8"?>
 <ds:datastoreItem xmlns:ds="http://schemas.openxmlformats.org/officeDocument/2006/customXml" ds:itemID="{FA7E68CE-20CE-48ED-8C76-D3F2B9F03559}">
   <ds:schemaRefs>
     <ds:schemaRef ds:uri="321487e1-d70a-4ac7-a45d-cb1aeb6d772e"/>
@@ -14227,31 +14040,6 @@
 </ds:datastoreItem>
 </file>
 
-<file path=customXml/itemProps2.xml><?xml version="1.0" encoding="utf-8"?>
-<ds:datastoreItem xmlns:ds="http://schemas.openxmlformats.org/officeDocument/2006/customXml" ds:itemID="{3B5B47CC-B35C-4B2B-96E5-ADE35E9132A6}">
-  <ds:schemaRefs>
-    <ds:schemaRef ds:uri="http://schemas.microsoft.com/sharepoint/v3/contenttype/forms"/>
-  </ds:schemaRefs>
-</ds:datastoreItem>
-</file>
-
-<file path=customXml/itemProps3.xml><?xml version="1.0" encoding="utf-8"?>
-<ds:datastoreItem xmlns:ds="http://schemas.openxmlformats.org/officeDocument/2006/customXml" ds:itemID="{4A3BB7FB-BD89-47DF-9FB1-3F904DBEB2A1}">
-  <ds:schemaRefs>
-    <ds:schemaRef ds:uri="http://schemas.microsoft.com/office/2006/metadata/properties"/>
-    <ds:schemaRef ds:uri="http://purl.org/dc/elements/1.1/"/>
-    <ds:schemaRef ds:uri="321487e1-d70a-4ac7-a45d-cb1aeb6d772e"/>
-    <ds:schemaRef ds:uri="http://schemas.openxmlformats.org/package/2006/metadata/core-properties"/>
-    <ds:schemaRef ds:uri="http://schemas.microsoft.com/office/2006/documentManagement/types"/>
-    <ds:schemaRef ds:uri="http://purl.org/dc/terms/"/>
-    <ds:schemaRef ds:uri="9481131a-5ef9-4c1f-b17b-99b9c4b05bfc"/>
-    <ds:schemaRef ds:uri="http://www.w3.org/XML/1998/namespace"/>
-    <ds:schemaRef ds:uri="http://schemas.microsoft.com/office/infopath/2007/PartnerControls"/>
-    <ds:schemaRef ds:uri="http://purl.org/dc/dcmitype/"/>
-  </ds:schemaRefs>
-</ds:datastoreItem>
-</file>
-
 <file path=docMetadata/LabelInfo.xml><?xml version="1.0" encoding="utf-8"?>
 <clbl:labelList xmlns:clbl="http://schemas.microsoft.com/office/2020/mipLabelMetadata">
   <clbl:label id="{37c354b2-85b0-47f5-b222-07b48d774ee3}" enabled="0" method="" siteId="{37c354b2-85b0-47f5-b222-07b48d774ee3}" removed="1"/>
